--- a/docs/SIH2026_PRAMAAN_Idea_Submission_v2.pptx
+++ b/docs/SIH2026_PRAMAAN_Idea_Submission_v2.pptx
@@ -9012,7 +9012,7 @@
       </p:sp>
       <p:pic>
         <p:nvPicPr>
-          <p:cNvPr id="17430" name="Picture 17429" descr="_fig1_white.png"/>
+          <p:cNvPr id="17430" name="Picture 17429" descr="_fig2_deck.png"/>
           <p:cNvPicPr>
             <a:picLocks noChangeAspect="1"/>
           </p:cNvPicPr>
@@ -9071,7 +9071,7 @@
                 </a:solidFill>
                 <a:latin typeface="Calibri"/>
               </a:rPr>
-              <a:t>Runtime architecture. The reconciliation engine is a pure function — an evidence bundle in, a verdict out — so any verdict is reproducible from its stored lineage.</a:t>
+              <a:t>The reconciliation mechanism. Six evidence families weighted into one verdict — five independent of the photograph, which is the claim’s own source and weighted lowest. The detectability gate disables per-structure satellite evidence below one 30 m pixel; the engine is a pure function — same bundle, same verdict.</a:t>
             </a:r>
           </a:p>
         </p:txBody>
